--- a/classes/parte-0-fundamentos-y-prerrequisitos/025-etica-legalidad-alcance-y-divulgacion-responsable/clase-025-presentacion.pptx
+++ b/classes/parte-0-fundamentos-y-prerrequisitos/025-etica-legalidad-alcance-y-divulgacion-responsable/clase-025-presentacion.pptx
@@ -17,6 +17,10 @@
     <p:sldId id="265" r:id="rId16"/>
     <p:sldId id="266" r:id="rId17"/>
     <p:sldId id="267" r:id="rId18"/>
+    <p:sldId id="268" r:id="rId19"/>
+    <p:sldId id="269" r:id="rId20"/>
+    <p:sldId id="270" r:id="rId21"/>
+    <p:sldId id="271" r:id="rId22"/>
   </p:sldIdLst>
   <p:sldSz cx="9144000" cy="6858000" type="screen4x3"/>
   <p:notesSz cx="6858000" cy="9144000"/>
@@ -3198,7 +3202,7 @@
                   <a:srgbClr val="0B3D2E"/>
                 </a:solidFill>
               </a:rPr>
-              <a:t>⚠️ Errores comunes</a:t>
+              <a:t>✍️ Ejercicios</a:t>
             </a:r>
           </a:p>
         </p:txBody>
@@ -3236,67 +3240,97 @@
                   <a:srgbClr val="22282E"/>
                 </a:solidFill>
               </a:rPr>
-              <a:t>•  "Es solo un escaneo, no hace daño" — Escanear sin permiso ya puede ser delito según la jurisdicción. Exige autorización siempre.</a:t>
-            </a:r>
-          </a:p>
-          <a:p>
-            <a:pPr>
-              <a:spcAft>
-                <a:spcPts val="600"/>
-              </a:spcAft>
-            </a:pPr>
-            <a:r>
-              <a:rPr sz="1500">
-                <a:solidFill>
-                  <a:srgbClr val="22282E"/>
-                </a:solidFill>
-              </a:rPr>
-              <a:t>•  Autorización verbal o informal — Insuficiente y arriesgada. Debe ser explícita y por escrito, con alcance claro.</a:t>
-            </a:r>
-          </a:p>
-          <a:p>
-            <a:pPr>
-              <a:spcAft>
-                <a:spcPts val="600"/>
-              </a:spcAft>
-            </a:pPr>
-            <a:r>
-              <a:rPr sz="1500">
-                <a:solidFill>
-                  <a:srgbClr val="22282E"/>
-                </a:solidFill>
-              </a:rPr>
-              <a:t>•  Salirse del alcance "porque encontré algo interesante" — Convierte un test legal en ilegal. Ante hallazgos fuera de scope, para y consulta.</a:t>
-            </a:r>
-          </a:p>
-          <a:p>
-            <a:pPr>
-              <a:spcAft>
-                <a:spcPts val="600"/>
-              </a:spcAft>
-            </a:pPr>
-            <a:r>
-              <a:rPr sz="1500">
-                <a:solidFill>
-                  <a:srgbClr val="22282E"/>
-                </a:solidFill>
-              </a:rPr>
-              <a:t>•  Publicar un 0-day sin avisar al fabricante — Irresponsable y a veces ilegal. Sigue un proceso CVD con plazos.</a:t>
-            </a:r>
-          </a:p>
-          <a:p>
-            <a:pPr>
-              <a:spcAft>
-                <a:spcPts val="600"/>
-              </a:spcAft>
-            </a:pPr>
-            <a:r>
-              <a:rPr sz="1500">
-                <a:solidFill>
-                  <a:srgbClr val="22282E"/>
-                </a:solidFill>
-              </a:rPr>
-              <a:t>•  Guardar datos reales del cliente tras el test — Riesgo legal y ético. Define destrucción y manejo en las RoE.</a:t>
+              <a:t>•  Explica por qué "tenía buena intención" no constituye una defensa legal frente a un acceso no autorizado.</a:t>
+            </a:r>
+          </a:p>
+          <a:p>
+            <a:pPr>
+              <a:spcAft>
+                <a:spcPts val="600"/>
+              </a:spcAft>
+            </a:pPr>
+            <a:r>
+              <a:rPr sz="1500">
+                <a:solidFill>
+                  <a:srgbClr val="22282E"/>
+                </a:solidFill>
+              </a:rPr>
+              <a:t>•  Enumera seis elementos que no pueden faltar en unas RoE de pentest y justifica brevemente cada uno.</a:t>
+            </a:r>
+          </a:p>
+          <a:p>
+            <a:pPr>
+              <a:spcAft>
+                <a:spcPts val="600"/>
+              </a:spcAft>
+            </a:pPr>
+            <a:r>
+              <a:rPr sz="1500">
+                <a:solidFill>
+                  <a:srgbClr val="22282E"/>
+                </a:solidFill>
+              </a:rPr>
+              <a:t>•  Da tres ejemplos de acciones que, aun con una autorización general, deberían estar explícitamente excluidas del alcance y explica por qué.</a:t>
+            </a:r>
+          </a:p>
+          <a:p>
+            <a:pPr>
+              <a:spcAft>
+                <a:spcPts val="600"/>
+              </a:spcAft>
+            </a:pPr>
+            <a:r>
+              <a:rPr sz="1500">
+                <a:solidFill>
+                  <a:srgbClr val="22282E"/>
+                </a:solidFill>
+              </a:rPr>
+              <a:t>•  Describe el proceso de divulgación coordinada paso a paso, incluyendo qué hacer si el fabricante no responde en un plazo razonable.</a:t>
+            </a:r>
+          </a:p>
+          <a:p>
+            <a:pPr>
+              <a:spcAft>
+                <a:spcPts val="600"/>
+              </a:spcAft>
+            </a:pPr>
+            <a:r>
+              <a:rPr sz="1500">
+                <a:solidFill>
+                  <a:srgbClr val="22282E"/>
+                </a:solidFill>
+              </a:rPr>
+              <a:t>•  Diferencia el hacking ético, el grey hat y el black hat con un ejemplo concreto de cada uno, señalando la variable que los separa.</a:t>
+            </a:r>
+          </a:p>
+          <a:p>
+            <a:pPr>
+              <a:spcAft>
+                <a:spcPts val="600"/>
+              </a:spcAft>
+            </a:pPr>
+            <a:r>
+              <a:rPr sz="1500">
+                <a:solidFill>
+                  <a:srgbClr val="22282E"/>
+                </a:solidFill>
+              </a:rPr>
+              <a:t>•  Investiga qué es una cláusula de "safe harbor" en un bug bounty, qué protege exactamente y qué queda fuera de su cobertura.</a:t>
+            </a:r>
+          </a:p>
+          <a:p>
+            <a:pPr>
+              <a:spcAft>
+                <a:spcPts val="600"/>
+              </a:spcAft>
+            </a:pPr>
+            <a:r>
+              <a:rPr sz="1500">
+                <a:solidFill>
+                  <a:srgbClr val="22282E"/>
+                </a:solidFill>
+              </a:rPr>
+              <a:t>•  Redacta el protocolo que seguirías si durante un test autorizado descubres datos personales reales de terceros expuestos.</a:t>
             </a:r>
           </a:p>
         </p:txBody>
@@ -3347,7 +3381,7 @@
                   <a:srgbClr val="0B3D2E"/>
                 </a:solidFill>
               </a:rPr>
-              <a:t>❓ Preguntas frecuentes</a:t>
+              <a:t>📝 Reto verificable</a:t>
             </a:r>
           </a:p>
         </p:txBody>
@@ -3385,52 +3419,22 @@
                   <a:srgbClr val="22282E"/>
                 </a:solidFill>
               </a:rPr>
-              <a:t>•  ❓ ¿Puedo practicar en cualquier web "para aprender"? No. Practica solo en tu laboratorio, en plataformas diseñadas para ello (HackTheBox, TryHackMe, VulnHub, CTFs) o en programas de bug bounty que te autoricen explícitamente dentro de sus reglas.</a:t>
-            </a:r>
-          </a:p>
-          <a:p>
-            <a:pPr>
-              <a:spcAft>
-                <a:spcPts val="600"/>
-              </a:spcAft>
-            </a:pPr>
-            <a:r>
-              <a:rPr sz="1500">
-                <a:solidFill>
-                  <a:srgbClr val="22282E"/>
-                </a:solidFill>
-              </a:rPr>
-              <a:t>•  ❓ ¿La autorización de un empleado basta? Debe provenir de quien tiene potestad sobre el sistema (propietario o responsable con autoridad). Verifica que quien firma puede autorizar legalmente el test.</a:t>
-            </a:r>
-          </a:p>
-          <a:p>
-            <a:pPr>
-              <a:spcAft>
-                <a:spcPts val="600"/>
-              </a:spcAft>
-            </a:pPr>
-            <a:r>
-              <a:rPr sz="1500">
-                <a:solidFill>
-                  <a:srgbClr val="22282E"/>
-                </a:solidFill>
-              </a:rPr>
-              <a:t>•  ❓ ¿Qué hago si encuentro una vulnerabilidad grave por casualidad? No la explotes ni la difundas. Sigue divulgación coordinada: contacta al responsable de forma privada, documenta con cuidado y da un plazo razonable antes de publicar.</a:t>
-            </a:r>
-          </a:p>
-          <a:p>
-            <a:pPr>
-              <a:spcAft>
-                <a:spcPts val="600"/>
-              </a:spcAft>
-            </a:pPr>
-            <a:r>
-              <a:rPr sz="1500">
-                <a:solidFill>
-                  <a:srgbClr val="22282E"/>
-                </a:solidFill>
-              </a:rPr>
-              <a:t>•  ❓ ¿Un bug bounty me protege legalmente? Solo dentro de su alcance y reglas ("safe harbor"). Salirte de ellas te deja sin protección. Lee siempre la política antes de probar.</a:t>
+              <a:t>•  Elabora un paquete de autorización completo para un compromiso ficticio compuesto de cuatro documentos: (1) un documento de alcance con activos incluidos y excluidos; (2) unas reglas de compromiso…</a:t>
+            </a:r>
+          </a:p>
+          <a:p>
+            <a:pPr>
+              <a:spcAft>
+                <a:spcPts val="600"/>
+              </a:spcAft>
+            </a:pPr>
+            <a:r>
+              <a:rPr sz="1500">
+                <a:solidFill>
+                  <a:srgbClr val="22282E"/>
+                </a:solidFill>
+              </a:rPr>
+              <a:t>•  Criterio de aceptación: un revisor puede determinar sin ambigüedad, a partir de tus documentos, si una acción concreta (por ejemplo, escanear una IP dada o lanzar un DoS) está autorizada o no. El…</a:t>
             </a:r>
           </a:p>
         </p:txBody>
@@ -3481,7 +3485,7 @@
                   <a:srgbClr val="0B3D2E"/>
                 </a:solidFill>
               </a:rPr>
-              <a:t>🔗 Referencias</a:t>
+              <a:t>⚠️ Errores comunes</a:t>
             </a:r>
           </a:p>
         </p:txBody>
@@ -3519,6 +3523,319 @@
                   <a:srgbClr val="22282E"/>
                 </a:solidFill>
               </a:rPr>
+              <a:t>•  "Es solo un escaneo, no hace daño" — Escanear sin permiso ya puede ser delito según la jurisdicción. Exige autorización siempre, incluso para reconocimiento.</a:t>
+            </a:r>
+          </a:p>
+          <a:p>
+            <a:pPr>
+              <a:spcAft>
+                <a:spcPts val="600"/>
+              </a:spcAft>
+            </a:pPr>
+            <a:r>
+              <a:rPr sz="1500">
+                <a:solidFill>
+                  <a:srgbClr val="22282E"/>
+                </a:solidFill>
+              </a:rPr>
+              <a:t>•  Autorización verbal o informal — Insuficiente y arriesgada. Debe ser explícita, por escrito y con alcance claro, firmada por quien tiene potestad.</a:t>
+            </a:r>
+          </a:p>
+          <a:p>
+            <a:pPr>
+              <a:spcAft>
+                <a:spcPts val="600"/>
+              </a:spcAft>
+            </a:pPr>
+            <a:r>
+              <a:rPr sz="1500">
+                <a:solidFill>
+                  <a:srgbClr val="22282E"/>
+                </a:solidFill>
+              </a:rPr>
+              <a:t>•  Salirse del alcance "porque encontré algo interesante" — Convierte un test legal en ilegal. Ante hallazgos fuera de scope, detente, documenta y consulta.</a:t>
+            </a:r>
+          </a:p>
+          <a:p>
+            <a:pPr>
+              <a:spcAft>
+                <a:spcPts val="600"/>
+              </a:spcAft>
+            </a:pPr>
+            <a:r>
+              <a:rPr sz="1500">
+                <a:solidFill>
+                  <a:srgbClr val="22282E"/>
+                </a:solidFill>
+              </a:rPr>
+              <a:t>•  Publicar un 0-day sin avisar al fabricante — Irresponsable y a veces ilegal. Sigue un proceso CVD con plazos y reporte privado previo.</a:t>
+            </a:r>
+          </a:p>
+          <a:p>
+            <a:pPr>
+              <a:spcAft>
+                <a:spcPts val="600"/>
+              </a:spcAft>
+            </a:pPr>
+            <a:r>
+              <a:rPr sz="1500">
+                <a:solidFill>
+                  <a:srgbClr val="22282E"/>
+                </a:solidFill>
+              </a:rPr>
+              <a:t>•  Guardar datos reales del cliente tras el test — Riesgo legal y ético. Define en las RoE el manejo, la retención mínima y la destrucción de la información.</a:t>
+            </a:r>
+          </a:p>
+          <a:p>
+            <a:pPr>
+              <a:spcAft>
+                <a:spcPts val="600"/>
+              </a:spcAft>
+            </a:pPr>
+            <a:r>
+              <a:rPr sz="1500">
+                <a:solidFill>
+                  <a:srgbClr val="22282E"/>
+                </a:solidFill>
+              </a:rPr>
+              <a:t>•  Aceptar autorización de quien no tiene potestad — Puede no ser válida legalmente. Verifica que el firmante tiene autoridad sobre el sistema.</a:t>
+            </a:r>
+          </a:p>
+        </p:txBody>
+      </p:sp>
+    </p:spTree>
+  </p:cSld>
+  <p:clrMapOvr>
+    <a:masterClrMapping/>
+  </p:clrMapOvr>
+</p:sld>
+</file>
+
+<file path=ppt/slides/slide13.xml><?xml version="1.0" encoding="utf-8"?>
+<p:sld xmlns:a="http://schemas.openxmlformats.org/drawingml/2006/main" xmlns:p="http://schemas.openxmlformats.org/presentationml/2006/main" xmlns:r="http://schemas.openxmlformats.org/officeDocument/2006/relationships">
+  <p:cSld>
+    <p:spTree>
+      <p:nvGrpSpPr>
+        <p:cNvPr id="1" name=""/>
+        <p:cNvGrpSpPr/>
+        <p:nvPr/>
+      </p:nvGrpSpPr>
+      <p:grpSpPr/>
+      <p:sp>
+        <p:nvSpPr>
+          <p:cNvPr id="2" name="TextBox 1"/>
+          <p:cNvSpPr txBox="1"/>
+          <p:nvPr/>
+        </p:nvSpPr>
+        <p:spPr>
+          <a:xfrm>
+            <a:off x="457200" y="320040"/>
+            <a:ext cx="8229600" cy="822960"/>
+          </a:xfrm>
+          <a:prstGeom prst="rect">
+            <a:avLst/>
+          </a:prstGeom>
+          <a:noFill/>
+        </p:spPr>
+        <p:txBody>
+          <a:bodyPr wrap="square">
+            <a:spAutoFit/>
+          </a:bodyPr>
+          <a:lstStyle/>
+          <a:p>
+            <a:r>
+              <a:rPr sz="2600" b="1">
+                <a:solidFill>
+                  <a:srgbClr val="0B3D2E"/>
+                </a:solidFill>
+              </a:rPr>
+              <a:t>❓ Preguntas frecuentes</a:t>
+            </a:r>
+          </a:p>
+        </p:txBody>
+      </p:sp>
+      <p:sp>
+        <p:nvSpPr>
+          <p:cNvPr id="3" name="TextBox 2"/>
+          <p:cNvSpPr txBox="1"/>
+          <p:nvPr/>
+        </p:nvSpPr>
+        <p:spPr>
+          <a:xfrm>
+            <a:off x="457200" y="1280160"/>
+            <a:ext cx="8229600" cy="4937760"/>
+          </a:xfrm>
+          <a:prstGeom prst="rect">
+            <a:avLst/>
+          </a:prstGeom>
+          <a:noFill/>
+        </p:spPr>
+        <p:txBody>
+          <a:bodyPr wrap="square">
+            <a:spAutoFit/>
+          </a:bodyPr>
+          <a:lstStyle/>
+          <a:p>
+            <a:pPr>
+              <a:spcAft>
+                <a:spcPts val="600"/>
+              </a:spcAft>
+            </a:pPr>
+            <a:r>
+              <a:rPr sz="1500">
+                <a:solidFill>
+                  <a:srgbClr val="22282E"/>
+                </a:solidFill>
+              </a:rPr>
+              <a:t>•  ❓ ¿Puedo practicar en cualquier web "para aprender"? No. Practica solo en tu laboratorio, en plataformas diseñadas para ello (HackTheBox, TryHackMe, VulnHub, CTFs) o en programas de bug bounty que te…</a:t>
+            </a:r>
+          </a:p>
+          <a:p>
+            <a:pPr>
+              <a:spcAft>
+                <a:spcPts val="600"/>
+              </a:spcAft>
+            </a:pPr>
+            <a:r>
+              <a:rPr sz="1500">
+                <a:solidFill>
+                  <a:srgbClr val="22282E"/>
+                </a:solidFill>
+              </a:rPr>
+              <a:t>•  ❓ ¿La autorización de un empleado cualquiera basta? No necesariamente. Debe provenir de quien tiene potestad sobre el sistema —el propietario o un responsable con autoridad para consentir. Verifica…</a:t>
+            </a:r>
+          </a:p>
+          <a:p>
+            <a:pPr>
+              <a:spcAft>
+                <a:spcPts val="600"/>
+              </a:spcAft>
+            </a:pPr>
+            <a:r>
+              <a:rPr sz="1500">
+                <a:solidFill>
+                  <a:srgbClr val="22282E"/>
+                </a:solidFill>
+              </a:rPr>
+              <a:t>•  ❓ ¿Qué hago si encuentro una vulnerabilidad grave por casualidad? No la explotes ni la difundas. Sigue la divulgación coordinada: contacta de forma privada al responsable, documenta con cuidado los…</a:t>
+            </a:r>
+          </a:p>
+          <a:p>
+            <a:pPr>
+              <a:spcAft>
+                <a:spcPts val="600"/>
+              </a:spcAft>
+            </a:pPr>
+            <a:r>
+              <a:rPr sz="1500">
+                <a:solidFill>
+                  <a:srgbClr val="22282E"/>
+                </a:solidFill>
+              </a:rPr>
+              <a:t>•  ❓ ¿Un bug bounty me protege legalmente? Solo dentro de su alcance y sus reglas (cláusula de "safe harbor"). En cuanto te sales de ellas —tocas un activo fuera de scope, usas una técnica prohibida o…</a:t>
+            </a:r>
+          </a:p>
+          <a:p>
+            <a:pPr>
+              <a:spcAft>
+                <a:spcPts val="600"/>
+              </a:spcAft>
+            </a:pPr>
+            <a:r>
+              <a:rPr sz="1500">
+                <a:solidFill>
+                  <a:srgbClr val="22282E"/>
+                </a:solidFill>
+              </a:rPr>
+              <a:t>•  ❓ ¿Por qué esta clase es un prerrequisito de todo el programa? Porque todas las técnicas que aprenderás después son neutrales: legales con autorización, delictivas sin ella. Sin este marco, el…</a:t>
+            </a:r>
+          </a:p>
+        </p:txBody>
+      </p:sp>
+    </p:spTree>
+  </p:cSld>
+  <p:clrMapOvr>
+    <a:masterClrMapping/>
+  </p:clrMapOvr>
+</p:sld>
+</file>
+
+<file path=ppt/slides/slide14.xml><?xml version="1.0" encoding="utf-8"?>
+<p:sld xmlns:a="http://schemas.openxmlformats.org/drawingml/2006/main" xmlns:p="http://schemas.openxmlformats.org/presentationml/2006/main" xmlns:r="http://schemas.openxmlformats.org/officeDocument/2006/relationships">
+  <p:cSld>
+    <p:spTree>
+      <p:nvGrpSpPr>
+        <p:cNvPr id="1" name=""/>
+        <p:cNvGrpSpPr/>
+        <p:nvPr/>
+      </p:nvGrpSpPr>
+      <p:grpSpPr/>
+      <p:sp>
+        <p:nvSpPr>
+          <p:cNvPr id="2" name="TextBox 1"/>
+          <p:cNvSpPr txBox="1"/>
+          <p:nvPr/>
+        </p:nvSpPr>
+        <p:spPr>
+          <a:xfrm>
+            <a:off x="457200" y="320040"/>
+            <a:ext cx="8229600" cy="822960"/>
+          </a:xfrm>
+          <a:prstGeom prst="rect">
+            <a:avLst/>
+          </a:prstGeom>
+          <a:noFill/>
+        </p:spPr>
+        <p:txBody>
+          <a:bodyPr wrap="square">
+            <a:spAutoFit/>
+          </a:bodyPr>
+          <a:lstStyle/>
+          <a:p>
+            <a:r>
+              <a:rPr sz="2600" b="1">
+                <a:solidFill>
+                  <a:srgbClr val="0B3D2E"/>
+                </a:solidFill>
+              </a:rPr>
+              <a:t>🔗 Referencias</a:t>
+            </a:r>
+          </a:p>
+        </p:txBody>
+      </p:sp>
+      <p:sp>
+        <p:nvSpPr>
+          <p:cNvPr id="3" name="TextBox 2"/>
+          <p:cNvSpPr txBox="1"/>
+          <p:nvPr/>
+        </p:nvSpPr>
+        <p:spPr>
+          <a:xfrm>
+            <a:off x="457200" y="1280160"/>
+            <a:ext cx="8229600" cy="4937760"/>
+          </a:xfrm>
+          <a:prstGeom prst="rect">
+            <a:avLst/>
+          </a:prstGeom>
+          <a:noFill/>
+        </p:spPr>
+        <p:txBody>
+          <a:bodyPr wrap="square">
+            <a:spAutoFit/>
+          </a:bodyPr>
+          <a:lstStyle/>
+          <a:p>
+            <a:pPr>
+              <a:spcAft>
+                <a:spcPts val="600"/>
+              </a:spcAft>
+            </a:pPr>
+            <a:r>
+              <a:rPr sz="1500">
+                <a:solidFill>
+                  <a:srgbClr val="22282E"/>
+                </a:solidFill>
+              </a:rPr>
               <a:t>•  ISO/IEC 29147 (divulgación de vulnerabilidades) — &lt;https://www.iso.org/standard/72311.html&gt;</a:t>
             </a:r>
           </a:p>
@@ -3549,7 +3866,7 @@
                   <a:srgbClr val="22282E"/>
                 </a:solidFill>
               </a:rPr>
-              <a:t>•  CISA Coordinated Vulnerability Disclosure — &lt;https://www.cisa.gov/coordinated-vulnerability-disclosure-process&gt;</a:t>
+              <a:t>•  CISA Coordinated Vulnerability Disclosure Process — &lt;https://www.cisa.gov/coordinated-vulnerability-disclosure-process&gt;</a:t>
             </a:r>
           </a:p>
           <a:p>
@@ -3567,8 +3884,173 @@
               <a:t>•  EC-Council Code of Ethics — &lt;https://www.eccouncil.org/code-of-ethics/&gt;</a:t>
             </a:r>
           </a:p>
-        </p:txBody>
-      </p:sp>
+          <a:p>
+            <a:pPr>
+              <a:spcAft>
+                <a:spcPts val="600"/>
+              </a:spcAft>
+            </a:pPr>
+            <a:r>
+              <a:rPr sz="1500">
+                <a:solidFill>
+                  <a:srgbClr val="22282E"/>
+                </a:solidFill>
+              </a:rPr>
+              <a:t>•  FIRST Guidelines and Practices for Multi-Party Vulnerability Coordination — &lt;https://www.first.org/global/sigs/vulnerability-coordination/multiparty/guidelines-v1.1&gt;</a:t>
+            </a:r>
+          </a:p>
+        </p:txBody>
+      </p:sp>
+    </p:spTree>
+  </p:cSld>
+  <p:clrMapOvr>
+    <a:masterClrMapping/>
+  </p:clrMapOvr>
+</p:sld>
+</file>
+
+<file path=ppt/slides/slide15.xml><?xml version="1.0" encoding="utf-8"?>
+<p:sld xmlns:a="http://schemas.openxmlformats.org/drawingml/2006/main" xmlns:p="http://schemas.openxmlformats.org/presentationml/2006/main" xmlns:r="http://schemas.openxmlformats.org/officeDocument/2006/relationships">
+  <p:cSld>
+    <p:spTree>
+      <p:nvGrpSpPr>
+        <p:cNvPr id="1" name=""/>
+        <p:cNvGrpSpPr/>
+        <p:nvPr/>
+      </p:nvGrpSpPr>
+      <p:grpSpPr/>
+      <p:sp>
+        <p:nvSpPr>
+          <p:cNvPr id="2" name="TextBox 1"/>
+          <p:cNvSpPr txBox="1"/>
+          <p:nvPr/>
+        </p:nvSpPr>
+        <p:spPr>
+          <a:xfrm>
+            <a:off x="457200" y="274320"/>
+            <a:ext cx="8229600" cy="640080"/>
+          </a:xfrm>
+          <a:prstGeom prst="rect">
+            <a:avLst/>
+          </a:prstGeom>
+          <a:noFill/>
+        </p:spPr>
+        <p:txBody>
+          <a:bodyPr wrap="square">
+            <a:spAutoFit/>
+          </a:bodyPr>
+          <a:lstStyle/>
+          <a:p>
+            <a:r>
+              <a:rPr sz="2200" b="1">
+                <a:solidFill>
+                  <a:srgbClr val="0B3D2E"/>
+                </a:solidFill>
+              </a:rPr>
+              <a:t>Diagrama 1</a:t>
+            </a:r>
+          </a:p>
+        </p:txBody>
+      </p:sp>
+      <p:pic>
+        <p:nvPicPr>
+          <p:cNvPr id="3" name="Picture 2" descr="783263b5e72e312d.png"/>
+          <p:cNvPicPr>
+            <a:picLocks noChangeAspect="1"/>
+          </p:cNvPicPr>
+          <p:nvPr/>
+        </p:nvPicPr>
+        <p:blipFill>
+          <a:blip r:embed="rId2"/>
+          <a:stretch>
+            <a:fillRect/>
+          </a:stretch>
+        </p:blipFill>
+        <p:spPr>
+          <a:xfrm>
+            <a:off x="2640507" y="1097280"/>
+            <a:ext cx="3862985" cy="5303520"/>
+          </a:xfrm>
+          <a:prstGeom prst="rect">
+            <a:avLst/>
+          </a:prstGeom>
+        </p:spPr>
+      </p:pic>
+    </p:spTree>
+  </p:cSld>
+  <p:clrMapOvr>
+    <a:masterClrMapping/>
+  </p:clrMapOvr>
+</p:sld>
+</file>
+
+<file path=ppt/slides/slide16.xml><?xml version="1.0" encoding="utf-8"?>
+<p:sld xmlns:a="http://schemas.openxmlformats.org/drawingml/2006/main" xmlns:p="http://schemas.openxmlformats.org/presentationml/2006/main" xmlns:r="http://schemas.openxmlformats.org/officeDocument/2006/relationships">
+  <p:cSld>
+    <p:spTree>
+      <p:nvGrpSpPr>
+        <p:cNvPr id="1" name=""/>
+        <p:cNvGrpSpPr/>
+        <p:nvPr/>
+      </p:nvGrpSpPr>
+      <p:grpSpPr/>
+      <p:sp>
+        <p:nvSpPr>
+          <p:cNvPr id="2" name="TextBox 1"/>
+          <p:cNvSpPr txBox="1"/>
+          <p:nvPr/>
+        </p:nvSpPr>
+        <p:spPr>
+          <a:xfrm>
+            <a:off x="457200" y="274320"/>
+            <a:ext cx="8229600" cy="640080"/>
+          </a:xfrm>
+          <a:prstGeom prst="rect">
+            <a:avLst/>
+          </a:prstGeom>
+          <a:noFill/>
+        </p:spPr>
+        <p:txBody>
+          <a:bodyPr wrap="square">
+            <a:spAutoFit/>
+          </a:bodyPr>
+          <a:lstStyle/>
+          <a:p>
+            <a:r>
+              <a:rPr sz="2200" b="1">
+                <a:solidFill>
+                  <a:srgbClr val="0B3D2E"/>
+                </a:solidFill>
+              </a:rPr>
+              <a:t>Diagrama 2</a:t>
+            </a:r>
+          </a:p>
+        </p:txBody>
+      </p:sp>
+      <p:pic>
+        <p:nvPicPr>
+          <p:cNvPr id="3" name="Picture 2" descr="7cb69a475644a486.png"/>
+          <p:cNvPicPr>
+            <a:picLocks noChangeAspect="1"/>
+          </p:cNvPicPr>
+          <p:nvPr/>
+        </p:nvPicPr>
+        <p:blipFill>
+          <a:blip r:embed="rId2"/>
+          <a:stretch>
+            <a:fillRect/>
+          </a:stretch>
+        </p:blipFill>
+        <p:spPr>
+          <a:xfrm>
+            <a:off x="457200" y="1586330"/>
+            <a:ext cx="8229600" cy="4325420"/>
+          </a:xfrm>
+          <a:prstGeom prst="rect">
+            <a:avLst/>
+          </a:prstGeom>
+        </p:spPr>
+      </p:pic>
     </p:spTree>
   </p:cSld>
   <p:clrMapOvr>
@@ -3653,7 +4135,7 @@
                   <a:srgbClr val="22282E"/>
                 </a:solidFill>
               </a:rPr>
-              <a:t>•  Interiorizar el marco legal y ético que separa a un profesional de seguridad de un delincuente. Al terminar sabrás qué es la autorización, cómo se define y respeta el alcance de un compromiso, qué dicen las leyes relevantes y cómo divulgar vulnerabilidades de forma responsable. Esta clase es la que legitima todo lo demás del programa.</a:t>
+              <a:t>•  Interiorizar el marco legal y ético que separa a un profesional de seguridad de un delincuente informático. Al terminar sabrás qué es la autorización y por qué es innegociable, cómo se define y se…</a:t>
             </a:r>
           </a:p>
         </p:txBody>
@@ -3757,67 +4239,82 @@
                   <a:srgbClr val="22282E"/>
                 </a:solidFill>
               </a:rPr>
-              <a:t>•  Explicar por qué la autorización explícita es la línea que no se cruza.</a:t>
-            </a:r>
-          </a:p>
-          <a:p>
-            <a:pPr>
-              <a:spcAft>
-                <a:spcPts val="600"/>
-              </a:spcAft>
-            </a:pPr>
-            <a:r>
-              <a:rPr sz="1500">
-                <a:solidFill>
-                  <a:srgbClr val="22282E"/>
-                </a:solidFill>
-              </a:rPr>
-              <a:t>•  Definir el alcance (scope) de un compromiso y respetarlo.</a:t>
-            </a:r>
-          </a:p>
-          <a:p>
-            <a:pPr>
-              <a:spcAft>
-                <a:spcPts val="600"/>
-              </a:spcAft>
-            </a:pPr>
-            <a:r>
-              <a:rPr sz="1500">
-                <a:solidFill>
-                  <a:srgbClr val="22282E"/>
-                </a:solidFill>
-              </a:rPr>
-              <a:t>•  Identificar las leyes relevantes de delitos informáticos.</a:t>
-            </a:r>
-          </a:p>
-          <a:p>
-            <a:pPr>
-              <a:spcAft>
-                <a:spcPts val="600"/>
-              </a:spcAft>
-            </a:pPr>
-            <a:r>
-              <a:rPr sz="1500">
-                <a:solidFill>
-                  <a:srgbClr val="22282E"/>
-                </a:solidFill>
-              </a:rPr>
-              <a:t>•  Aplicar un proceso de divulgación responsable (CVD).</a:t>
-            </a:r>
-          </a:p>
-          <a:p>
-            <a:pPr>
-              <a:spcAft>
-                <a:spcPts val="600"/>
-              </a:spcAft>
-            </a:pPr>
-            <a:r>
-              <a:rPr sz="1500">
-                <a:solidFill>
-                  <a:srgbClr val="22282E"/>
-                </a:solidFill>
-              </a:rPr>
-              <a:t>•  Redactar los elementos clave de un acuerdo de pentesting (RoE).</a:t>
+              <a:t>•  Explicar por qué la autorización explícita y por escrito es la línea que nunca se cruza.</a:t>
+            </a:r>
+          </a:p>
+          <a:p>
+            <a:pPr>
+              <a:spcAft>
+                <a:spcPts val="600"/>
+              </a:spcAft>
+            </a:pPr>
+            <a:r>
+              <a:rPr sz="1500">
+                <a:solidFill>
+                  <a:srgbClr val="22282E"/>
+                </a:solidFill>
+              </a:rPr>
+              <a:t>•  Definir el alcance (scope) de un compromiso y justificar por qué salirse de él invalida la legalidad del test.</a:t>
+            </a:r>
+          </a:p>
+          <a:p>
+            <a:pPr>
+              <a:spcAft>
+                <a:spcPts val="600"/>
+              </a:spcAft>
+            </a:pPr>
+            <a:r>
+              <a:rPr sz="1500">
+                <a:solidFill>
+                  <a:srgbClr val="22282E"/>
+                </a:solidFill>
+              </a:rPr>
+              <a:t>•  Identificar las categorías de conducta que penan las leyes de delitos informáticos relevantes.</a:t>
+            </a:r>
+          </a:p>
+          <a:p>
+            <a:pPr>
+              <a:spcAft>
+                <a:spcPts val="600"/>
+              </a:spcAft>
+            </a:pPr>
+            <a:r>
+              <a:rPr sz="1500">
+                <a:solidFill>
+                  <a:srgbClr val="22282E"/>
+                </a:solidFill>
+              </a:rPr>
+              <a:t>•  Aplicar un proceso de divulgación coordinada de vulnerabilidades (CVD) paso a paso.</a:t>
+            </a:r>
+          </a:p>
+          <a:p>
+            <a:pPr>
+              <a:spcAft>
+                <a:spcPts val="600"/>
+              </a:spcAft>
+            </a:pPr>
+            <a:r>
+              <a:rPr sz="1500">
+                <a:solidFill>
+                  <a:srgbClr val="22282E"/>
+                </a:solidFill>
+              </a:rPr>
+              <a:t>•  Redactar los elementos imprescindibles de unas reglas de compromiso (RoE) de pentesting.</a:t>
+            </a:r>
+          </a:p>
+          <a:p>
+            <a:pPr>
+              <a:spcAft>
+                <a:spcPts val="600"/>
+              </a:spcAft>
+            </a:pPr>
+            <a:r>
+              <a:rPr sz="1500">
+                <a:solidFill>
+                  <a:srgbClr val="22282E"/>
+                </a:solidFill>
+              </a:rPr>
+              <a:t>•  Distinguir el hacking ético, el grey hat y el black hat por su relación con la autorización y la intención.</a:t>
             </a:r>
           </a:p>
         </p:txBody>
@@ -4047,7 +4544,7 @@
                   <a:srgbClr val="0B3D2E"/>
                 </a:solidFill>
               </a:rPr>
-              <a:t>📖 Definiciones y características</a:t>
+              <a:t>🧠 Explicación en profundidad</a:t>
             </a:r>
           </a:p>
         </p:txBody>
@@ -4085,82 +4582,67 @@
                   <a:srgbClr val="22282E"/>
                 </a:solidFill>
               </a:rPr>
-              <a:t>•  Autorización: permiso explícito, por escrito, del propietario del sistema para probarlo. Clave: sin ella, cualquier prueba es un delito, aunque la intención sea buena.</a:t>
-            </a:r>
-          </a:p>
-          <a:p>
-            <a:pPr>
-              <a:spcAft>
-                <a:spcPts val="600"/>
-              </a:spcAft>
-            </a:pPr>
-            <a:r>
-              <a:rPr sz="1500">
-                <a:solidFill>
-                  <a:srgbClr val="22282E"/>
-                </a:solidFill>
-              </a:rPr>
-              <a:t>•  Alcance (scope): conjunto de activos, rangos y técnicas permitidas. Clave: salir del alcance convierte un test autorizado en ilegal.</a:t>
-            </a:r>
-          </a:p>
-          <a:p>
-            <a:pPr>
-              <a:spcAft>
-                <a:spcPts val="600"/>
-              </a:spcAft>
-            </a:pPr>
-            <a:r>
-              <a:rPr sz="1500">
-                <a:solidFill>
-                  <a:srgbClr val="22282E"/>
-                </a:solidFill>
-              </a:rPr>
-              <a:t>•  Reglas de compromiso (RoE): documento que fija alcance, ventanas de tiempo, contactos, técnicas prohibidas y manejo de datos. Clave: protege a ambas partes.</a:t>
-            </a:r>
-          </a:p>
-          <a:p>
-            <a:pPr>
-              <a:spcAft>
-                <a:spcPts val="600"/>
-              </a:spcAft>
-            </a:pPr>
-            <a:r>
-              <a:rPr sz="1500">
-                <a:solidFill>
-                  <a:srgbClr val="22282E"/>
-                </a:solidFill>
-              </a:rPr>
-              <a:t>•  Divulgación coordinada (CVD): proceso de reportar una vulnerabilidad al fabricante y dar plazo antes de publicarla. Clave: equilibra transparencia y riesgo.</a:t>
-            </a:r>
-          </a:p>
-          <a:p>
-            <a:pPr>
-              <a:spcAft>
-                <a:spcPts val="600"/>
-              </a:spcAft>
-            </a:pPr>
-            <a:r>
-              <a:rPr sz="1500">
-                <a:solidFill>
-                  <a:srgbClr val="22282E"/>
-                </a:solidFill>
-              </a:rPr>
-              <a:t>•  Bug bounty: programa que autoriza y recompensa el reporte de fallos dentro de reglas publicadas. Clave: autorización previa acotada.</a:t>
-            </a:r>
-          </a:p>
-          <a:p>
-            <a:pPr>
-              <a:spcAft>
-                <a:spcPts val="600"/>
-              </a:spcAft>
-            </a:pPr>
-            <a:r>
-              <a:rPr sz="1500">
-                <a:solidFill>
-                  <a:srgbClr val="22282E"/>
-                </a:solidFill>
-              </a:rPr>
-              <a:t>•  White/grey/black hat: hacker ético, ambiguo o malicioso. Clave: la diferencia esencial es la autorización y la intención.</a:t>
+              <a:t>•  En seguridad ofensiva, la diferencia entre un profesional y un criminal no está en las herramientas ni en el conocimiento —son idénticos— sino en una sola cosa: la autorización. Un escaneo de…</a:t>
+            </a:r>
+          </a:p>
+          <a:p>
+            <a:pPr>
+              <a:spcAft>
+                <a:spcPts val="600"/>
+              </a:spcAft>
+            </a:pPr>
+            <a:r>
+              <a:rPr sz="1500">
+                <a:solidFill>
+                  <a:srgbClr val="22282E"/>
+                </a:solidFill>
+              </a:rPr>
+              <a:t>•  La autorización nunca es un cheque en blanco. El alcance (scope) delimita con precisión qué activos, rangos de red, aplicaciones y técnicas están permitidos, y —tan importante como lo anterior—…</a:t>
+            </a:r>
+          </a:p>
+          <a:p>
+            <a:pPr>
+              <a:spcAft>
+                <a:spcPts val="600"/>
+              </a:spcAft>
+            </a:pPr>
+            <a:r>
+              <a:rPr sz="1500">
+                <a:solidFill>
+                  <a:srgbClr val="22282E"/>
+                </a:solidFill>
+              </a:rPr>
+              <a:t>•  Las reglas de compromiso (Rules of Engagement, RoE) son el documento que formaliza y da vida operativa a la autorización y el alcance. Unas RoE completas fijan al menos: el alcance detallado (activos…</a:t>
+            </a:r>
+          </a:p>
+          <a:p>
+            <a:pPr>
+              <a:spcAft>
+                <a:spcPts val="600"/>
+              </a:spcAft>
+            </a:pPr>
+            <a:r>
+              <a:rPr sz="1500">
+                <a:solidFill>
+                  <a:srgbClr val="22282E"/>
+                </a:solidFill>
+              </a:rPr>
+              <a:t>•  Las leyes de delitos informáticos varían por país, pero suelen tipificar categorías comunes: el acceso no autorizado a sistemas o datos, la interceptación ilegítima de comunicaciones, y los daños a…</a:t>
+            </a:r>
+          </a:p>
+          <a:p>
+            <a:pPr>
+              <a:spcAft>
+                <a:spcPts val="600"/>
+              </a:spcAft>
+            </a:pPr>
+            <a:r>
+              <a:rPr sz="1500">
+                <a:solidFill>
+                  <a:srgbClr val="22282E"/>
+                </a:solidFill>
+              </a:rPr>
+              <a:t>•  ¿Qué haces cuando descubres una vulnerabilidad real, dentro o fuera de un compromiso? La respuesta profesional es la divulgación coordinada de vulnerabilidades (CVD), un proceso que equilibra el…</a:t>
             </a:r>
           </a:p>
         </p:txBody>
@@ -4211,7 +4693,7 @@
                   <a:srgbClr val="0B3D2E"/>
                 </a:solidFill>
               </a:rPr>
-              <a:t>🧰 Herramientas y preparación</a:t>
+              <a:t>📖 Definiciones y características</a:t>
             </a:r>
           </a:p>
         </p:txBody>
@@ -4249,7 +4731,97 @@
                   <a:srgbClr val="22282E"/>
                 </a:solidFill>
               </a:rPr>
-              <a:t>•  Esta clase es conceptual y documental. Familiarízate con: la ley de delitos informáticos de tu país (por ejemplo, en EE. UU. la CFAA; en la UE la Directiva 2013/40/UE; consulta la de tu jurisdicción), los estándares ISO/IEC 29147 (divulgación) y 30111 (gestión), plantillas de RoE y programas de bug bounty (HackerOne, Bugcrowd) para ver reglas reales.</a:t>
+              <a:t>•  Autorización: permiso explícito, por escrito y otorgado por quien tiene potestad sobre el sistema, para probarlo. Sin ella, cualquier prueba es potencialmente delito, con independencia de la…</a:t>
+            </a:r>
+          </a:p>
+          <a:p>
+            <a:pPr>
+              <a:spcAft>
+                <a:spcPts val="600"/>
+              </a:spcAft>
+            </a:pPr>
+            <a:r>
+              <a:rPr sz="1500">
+                <a:solidFill>
+                  <a:srgbClr val="22282E"/>
+                </a:solidFill>
+              </a:rPr>
+              <a:t>•  Alcance (scope): conjunto de activos, rangos, aplicaciones y técnicas permitidas —y explícitamente prohibidas— en un compromiso. Salir del alcance convierte un test autorizado en una acción ilegal…</a:t>
+            </a:r>
+          </a:p>
+          <a:p>
+            <a:pPr>
+              <a:spcAft>
+                <a:spcPts val="600"/>
+              </a:spcAft>
+            </a:pPr>
+            <a:r>
+              <a:rPr sz="1500">
+                <a:solidFill>
+                  <a:srgbClr val="22282E"/>
+                </a:solidFill>
+              </a:rPr>
+              <a:t>•  Reglas de compromiso (RoE): documento que fija alcance, ventanas de tiempo, contactos, técnicas prohibidas, confidencialidad y manejo de datos. Protege legal y operativamente a ambas partes y nunca…</a:t>
+            </a:r>
+          </a:p>
+          <a:p>
+            <a:pPr>
+              <a:spcAft>
+                <a:spcPts val="600"/>
+              </a:spcAft>
+            </a:pPr>
+            <a:r>
+              <a:rPr sz="1500">
+                <a:solidFill>
+                  <a:srgbClr val="22282E"/>
+                </a:solidFill>
+              </a:rPr>
+              <a:t>•  Divulgación coordinada (CVD): proceso de reportar una vulnerabilidad de forma privada al responsable y dar plazo para corregirla antes de publicarla. Equilibra la transparencia con el riesgo de…</a:t>
+            </a:r>
+          </a:p>
+          <a:p>
+            <a:pPr>
+              <a:spcAft>
+                <a:spcPts val="600"/>
+              </a:spcAft>
+            </a:pPr>
+            <a:r>
+              <a:rPr sz="1500">
+                <a:solidFill>
+                  <a:srgbClr val="22282E"/>
+                </a:solidFill>
+              </a:rPr>
+              <a:t>•  Bug bounty: programa que autoriza y recompensa el reporte de fallos dentro de reglas publicadas. Constituye una autorización previa y acotada, válida solo mientras se respeten su alcance y sus…</a:t>
+            </a:r>
+          </a:p>
+          <a:p>
+            <a:pPr>
+              <a:spcAft>
+                <a:spcPts val="600"/>
+              </a:spcAft>
+            </a:pPr>
+            <a:r>
+              <a:rPr sz="1500">
+                <a:solidFill>
+                  <a:srgbClr val="22282E"/>
+                </a:solidFill>
+              </a:rPr>
+              <a:t>•  Safe harbor: cláusula de un programa que protege legalmente al investigador que actúa de buena fe dentro de las reglas. No cubre las acciones que se salgan del alcance o las condiciones establecidas.</a:t>
+            </a:r>
+          </a:p>
+          <a:p>
+            <a:pPr>
+              <a:spcAft>
+                <a:spcPts val="600"/>
+              </a:spcAft>
+            </a:pPr>
+            <a:r>
+              <a:rPr sz="1500">
+                <a:solidFill>
+                  <a:srgbClr val="22282E"/>
+                </a:solidFill>
+              </a:rPr>
+              <a:t>•  White / grey / black hat: categorías de hacker según autorización e intención. El white hat siempre tiene permiso y fin legítimo; el black hat carece de permiso y actúa con malicia; el grey hat opera…</a:t>
             </a:r>
           </a:p>
         </p:txBody>
@@ -4300,7 +4872,7 @@
                   <a:srgbClr val="0B3D2E"/>
                 </a:solidFill>
               </a:rPr>
-              <a:t>🧪 Laboratorio guiado (ejercicio aplicado)</a:t>
+              <a:t>📔 Glosario</a:t>
             </a:r>
           </a:p>
         </p:txBody>
@@ -4338,82 +4910,97 @@
                   <a:srgbClr val="22282E"/>
                 </a:solidFill>
               </a:rPr>
-              <a:t>•  Investiga tu jurisdicción. Localiza la ley de delitos informáticos aplicable donde vives y anota qué conductas tipifica (acceso no autorizado, interceptación, daños).</a:t>
-            </a:r>
-          </a:p>
-          <a:p>
-            <a:pPr>
-              <a:spcAft>
-                <a:spcPts val="600"/>
-              </a:spcAft>
-            </a:pPr>
-            <a:r>
-              <a:rPr sz="1500">
-                <a:solidFill>
-                  <a:srgbClr val="22282E"/>
-                </a:solidFill>
-              </a:rPr>
-              <a:t>•  Analiza un caso. Toma un escenario ("encontré una web con una vulnerabilidad evidente y la 'probé' sin permiso") y determina si es legal, por qué, y qué debió hacerse.</a:t>
-            </a:r>
-          </a:p>
-          <a:p>
-            <a:pPr>
-              <a:spcAft>
-                <a:spcPts val="600"/>
-              </a:spcAft>
-            </a:pPr>
-            <a:r>
-              <a:rPr sz="1500">
-                <a:solidFill>
-                  <a:srgbClr val="22282E"/>
-                </a:solidFill>
-              </a:rPr>
-              <a:t>•  Define un alcance. Redacta el scope de un pentest ficticio: rangos IP incluidos y excluidos, aplicaciones, técnicas prohibidas (p. ej. DoS, ingeniería social al personal), ventana horaria.</a:t>
-            </a:r>
-          </a:p>
-          <a:p>
-            <a:pPr>
-              <a:spcAft>
-                <a:spcPts val="600"/>
-              </a:spcAft>
-            </a:pPr>
-            <a:r>
-              <a:rPr sz="1500">
-                <a:solidFill>
-                  <a:srgbClr val="22282E"/>
-                </a:solidFill>
-              </a:rPr>
-              <a:t>•  Redacta RoE mínimas. Escribe las reglas de compromiso: contactos de emergencia, qué hacer si se encuentra un dato sensible real, manejo y destrucción de la información.</a:t>
-            </a:r>
-          </a:p>
-          <a:p>
-            <a:pPr>
-              <a:spcAft>
-                <a:spcPts val="600"/>
-              </a:spcAft>
-            </a:pPr>
-            <a:r>
-              <a:rPr sz="1500">
-                <a:solidFill>
-                  <a:srgbClr val="22282E"/>
-                </a:solidFill>
-              </a:rPr>
-              <a:t>•  Simula una divulgación responsable. Redacta un informe de vulnerabilidad para un fabricante siguiendo CVD: descripción, impacto, pasos de reproducción, y una propuesta de plazo de publicación.</a:t>
-            </a:r>
-          </a:p>
-          <a:p>
-            <a:pPr>
-              <a:spcAft>
-                <a:spcPts val="600"/>
-              </a:spcAft>
-            </a:pPr>
-            <a:r>
-              <a:rPr sz="1500">
-                <a:solidFill>
-                  <a:srgbClr val="22282E"/>
-                </a:solidFill>
-              </a:rPr>
-              <a:t>•  Revisa un programa de bug bounty real y extrae qué está en alcance, qué está fuera, y las reglas de "safe harbor".</a:t>
+              <a:t>•  Término — Definición concisa</a:t>
+            </a:r>
+          </a:p>
+          <a:p>
+            <a:pPr>
+              <a:spcAft>
+                <a:spcPts val="600"/>
+              </a:spcAft>
+            </a:pPr>
+            <a:r>
+              <a:rPr sz="1500">
+                <a:solidFill>
+                  <a:srgbClr val="22282E"/>
+                </a:solidFill>
+              </a:rPr>
+              <a:t>•  Autorización — Permiso explícito y por escrito del propietario</a:t>
+            </a:r>
+          </a:p>
+          <a:p>
+            <a:pPr>
+              <a:spcAft>
+                <a:spcPts val="600"/>
+              </a:spcAft>
+            </a:pPr>
+            <a:r>
+              <a:rPr sz="1500">
+                <a:solidFill>
+                  <a:srgbClr val="22282E"/>
+                </a:solidFill>
+              </a:rPr>
+              <a:t>•  Alcance (scope) — Activos y técnicas permitidos y prohibidos</a:t>
+            </a:r>
+          </a:p>
+          <a:p>
+            <a:pPr>
+              <a:spcAft>
+                <a:spcPts val="600"/>
+              </a:spcAft>
+            </a:pPr>
+            <a:r>
+              <a:rPr sz="1500">
+                <a:solidFill>
+                  <a:srgbClr val="22282E"/>
+                </a:solidFill>
+              </a:rPr>
+              <a:t>•  RoE — Reglas de compromiso de un pentest</a:t>
+            </a:r>
+          </a:p>
+          <a:p>
+            <a:pPr>
+              <a:spcAft>
+                <a:spcPts val="600"/>
+              </a:spcAft>
+            </a:pPr>
+            <a:r>
+              <a:rPr sz="1500">
+                <a:solidFill>
+                  <a:srgbClr val="22282E"/>
+                </a:solidFill>
+              </a:rPr>
+              <a:t>•  Pentest — Prueba de penetración autorizada</a:t>
+            </a:r>
+          </a:p>
+          <a:p>
+            <a:pPr>
+              <a:spcAft>
+                <a:spcPts val="600"/>
+              </a:spcAft>
+            </a:pPr>
+            <a:r>
+              <a:rPr sz="1500">
+                <a:solidFill>
+                  <a:srgbClr val="22282E"/>
+                </a:solidFill>
+              </a:rPr>
+              <a:t>•  CVD — Divulgación coordinada de vulnerabilidades</a:t>
+            </a:r>
+          </a:p>
+          <a:p>
+            <a:pPr>
+              <a:spcAft>
+                <a:spcPts val="600"/>
+              </a:spcAft>
+            </a:pPr>
+            <a:r>
+              <a:rPr sz="1500">
+                <a:solidFill>
+                  <a:srgbClr val="22282E"/>
+                </a:solidFill>
+              </a:rPr>
+              <a:t>•  0-day — Vulnerabilidad sin parche disponible</a:t>
             </a:r>
           </a:p>
         </p:txBody>
@@ -4464,7 +5051,7 @@
                   <a:srgbClr val="0B3D2E"/>
                 </a:solidFill>
               </a:rPr>
-              <a:t>✍️ Ejercicios</a:t>
+              <a:t>🧰 Herramientas y preparación</a:t>
             </a:r>
           </a:p>
         </p:txBody>
@@ -4502,82 +5089,7 @@
                   <a:srgbClr val="22282E"/>
                 </a:solidFill>
               </a:rPr>
-              <a:t>•  Explica por qué "tenía buena intención" no es defensa legal ante un acceso no autorizado.</a:t>
-            </a:r>
-          </a:p>
-          <a:p>
-            <a:pPr>
-              <a:spcAft>
-                <a:spcPts val="600"/>
-              </a:spcAft>
-            </a:pPr>
-            <a:r>
-              <a:rPr sz="1500">
-                <a:solidFill>
-                  <a:srgbClr val="22282E"/>
-                </a:solidFill>
-              </a:rPr>
-              <a:t>•  Enumera 6 elementos que no pueden faltar en unas RoE de pentest.</a:t>
-            </a:r>
-          </a:p>
-          <a:p>
-            <a:pPr>
-              <a:spcAft>
-                <a:spcPts val="600"/>
-              </a:spcAft>
-            </a:pPr>
-            <a:r>
-              <a:rPr sz="1500">
-                <a:solidFill>
-                  <a:srgbClr val="22282E"/>
-                </a:solidFill>
-              </a:rPr>
-              <a:t>•  Da tres ejemplos de acciones que, aun con autorización general, deberían estar explícitamente excluidas del alcance.</a:t>
-            </a:r>
-          </a:p>
-          <a:p>
-            <a:pPr>
-              <a:spcAft>
-                <a:spcPts val="600"/>
-              </a:spcAft>
-            </a:pPr>
-            <a:r>
-              <a:rPr sz="1500">
-                <a:solidFill>
-                  <a:srgbClr val="22282E"/>
-                </a:solidFill>
-              </a:rPr>
-              <a:t>•  Describe el proceso de divulgación coordinada paso a paso, incluyendo qué hacer si el fabricante no responde.</a:t>
-            </a:r>
-          </a:p>
-          <a:p>
-            <a:pPr>
-              <a:spcAft>
-                <a:spcPts val="600"/>
-              </a:spcAft>
-            </a:pPr>
-            <a:r>
-              <a:rPr sz="1500">
-                <a:solidFill>
-                  <a:srgbClr val="22282E"/>
-                </a:solidFill>
-              </a:rPr>
-              <a:t>•  Diferencia hacking ético, grey hat y black hat con un ejemplo de cada uno.</a:t>
-            </a:r>
-          </a:p>
-          <a:p>
-            <a:pPr>
-              <a:spcAft>
-                <a:spcPts val="600"/>
-              </a:spcAft>
-            </a:pPr>
-            <a:r>
-              <a:rPr sz="1500">
-                <a:solidFill>
-                  <a:srgbClr val="22282E"/>
-                </a:solidFill>
-              </a:rPr>
-              <a:t>•  Investiga qué es una cláusula de "safe harbor" en un bug bounty y qué protege.</a:t>
+              <a:t>•  Esta clase es conceptual y documental, pero exige preparación real. Familiarízate con la ley de delitos informáticos de tu país (por ejemplo, en EE. UU. la Computer Fraud and Abuse Act, CFAA; en la…</a:t>
             </a:r>
           </a:p>
         </p:txBody>
@@ -4628,7 +5140,7 @@
                   <a:srgbClr val="0B3D2E"/>
                 </a:solidFill>
               </a:rPr>
-              <a:t>📝 Reto verificable</a:t>
+              <a:t>🧪 Laboratorio guiado (ejercicio aplicado)</a:t>
             </a:r>
           </a:p>
         </p:txBody>
@@ -4666,22 +5178,82 @@
                   <a:srgbClr val="22282E"/>
                 </a:solidFill>
               </a:rPr>
-              <a:t>•  Elabora un paquete de autorización completo para un compromiso ficticio: (1) un documento de alcance con activos incluidos y excluidos, (2) reglas de compromiso con contactos y técnicas prohibidas, (3) una cláusula de confidencialidad y manejo de datos, y (4) una plantilla de informe de divulgación responsable. Debe ser suficiente para que un tercero entienda qué está y qué no está autorizado.</a:t>
-            </a:r>
-          </a:p>
-          <a:p>
-            <a:pPr>
-              <a:spcAft>
-                <a:spcPts val="600"/>
-              </a:spcAft>
-            </a:pPr>
-            <a:r>
-              <a:rPr sz="1500">
-                <a:solidFill>
-                  <a:srgbClr val="22282E"/>
-                </a:solidFill>
-              </a:rPr>
-              <a:t>•  Criterio de aceptación: un revisor puede determinar sin ambigüedad, a partir de tus documentos, si una acción concreta (p. ej. escanear una IP dada o lanzar un DoS) está autorizada o no. El paquete incluye qué hacer ante el hallazgo de datos sensibles reales y respeta la ley de tu jurisdicción.</a:t>
+              <a:t>•  Investiga tu jurisdicción. Localiza la ley de delitos informáticos aplicable donde vives y anota qué conductas tipifica (acceso no autorizado, interceptación, daños) y qué penas prevé.</a:t>
+            </a:r>
+          </a:p>
+          <a:p>
+            <a:pPr>
+              <a:spcAft>
+                <a:spcPts val="600"/>
+              </a:spcAft>
+            </a:pPr>
+            <a:r>
+              <a:rPr sz="1500">
+                <a:solidFill>
+                  <a:srgbClr val="22282E"/>
+                </a:solidFill>
+              </a:rPr>
+              <a:t>•  Analiza un caso. Toma el escenario "encontré una web con una vulnerabilidad evidente y la 'probé' sin permiso para confirmarla". Determina si es legal, por qué, y qué debió hacerse en su lugar.</a:t>
+            </a:r>
+          </a:p>
+          <a:p>
+            <a:pPr>
+              <a:spcAft>
+                <a:spcPts val="600"/>
+              </a:spcAft>
+            </a:pPr>
+            <a:r>
+              <a:rPr sz="1500">
+                <a:solidFill>
+                  <a:srgbClr val="22282E"/>
+                </a:solidFill>
+              </a:rPr>
+              <a:t>•  Define un alcance. Redacta el scope de un pentest ficticio: rangos IP incluidos y excluidos, aplicaciones cubiertas, técnicas prohibidas (por ejemplo DoS o ingeniería social al personal) y ventana…</a:t>
+            </a:r>
+          </a:p>
+          <a:p>
+            <a:pPr>
+              <a:spcAft>
+                <a:spcPts val="600"/>
+              </a:spcAft>
+            </a:pPr>
+            <a:r>
+              <a:rPr sz="1500">
+                <a:solidFill>
+                  <a:srgbClr val="22282E"/>
+                </a:solidFill>
+              </a:rPr>
+              <a:t>•  Redacta unas RoE mínimas. Escribe las reglas de compromiso: contactos de emergencia de ambas partes, protocolo ante el hallazgo de un dato sensible real, y manejo y destrucción de la información…</a:t>
+            </a:r>
+          </a:p>
+          <a:p>
+            <a:pPr>
+              <a:spcAft>
+                <a:spcPts val="600"/>
+              </a:spcAft>
+            </a:pPr>
+            <a:r>
+              <a:rPr sz="1500">
+                <a:solidFill>
+                  <a:srgbClr val="22282E"/>
+                </a:solidFill>
+              </a:rPr>
+              <a:t>•  Simula una divulgación responsable. Redacta un informe de vulnerabilidad para un fabricante siguiendo CVD: descripción, impacto, pasos de reproducción y una propuesta de plazo de publicación.</a:t>
+            </a:r>
+          </a:p>
+          <a:p>
+            <a:pPr>
+              <a:spcAft>
+                <a:spcPts val="600"/>
+              </a:spcAft>
+            </a:pPr>
+            <a:r>
+              <a:rPr sz="1500">
+                <a:solidFill>
+                  <a:srgbClr val="22282E"/>
+                </a:solidFill>
+              </a:rPr>
+              <a:t>•  Revisa un programa de bug bounty real. Extrae qué está en alcance, qué queda fuera y cómo está redactada su cláusula de safe harbor.</a:t>
             </a:r>
           </a:p>
         </p:txBody>
